--- a/10-plantas/01-steelmaking/05-capacitacion/MO-CC2-07/MO-CC2-07_Capacitacion_AMMX.pptx
+++ b/10-plantas/01-steelmaking/05-capacitacion/MO-CC2-07/MO-CC2-07_Capacitacion_AMMX.pptx
@@ -15791,7 +15791,7 @@
                           <a:ea typeface="Century Gothic" pitchFamily="34" charset="-122"/>
                           <a:cs typeface="Century Gothic" pitchFamily="34" charset="-120"/>
                         </a:rPr>
-                        <a:t>24 meses</a:t>
+                        <a:t>24 meses; radiación 12</a:t>
                       </a:r>
                       <a:endParaRPr lang="en-US" sz="950" dirty="0">
                         <a:latin typeface="Century Gothic" charset="0"/>
@@ -16133,7 +16133,7 @@
                           <a:ea typeface="Century Gothic" pitchFamily="34" charset="-122"/>
                           <a:cs typeface="Century Gothic" pitchFamily="34" charset="-120"/>
                         </a:rPr>
-                        <a:t>24 meses</a:t>
+                        <a:t>24 meses; radiación 12</a:t>
                       </a:r>
                       <a:endParaRPr lang="en-US" sz="950" dirty="0">
                         <a:latin typeface="Century Gothic" charset="0"/>
@@ -17791,7 +17791,7 @@
                 <a:ea typeface="Century Gothic" pitchFamily="34" charset="-122"/>
                 <a:cs typeface="Century Gothic" pitchFamily="34" charset="-120"/>
               </a:rPr>
-              <a:t>24 meses</a:t>
+              <a:t>24 meses; radiación 12</a:t>
             </a:r>
             <a:endParaRPr lang="en-US" sz="900" dirty="0"/>
           </a:p>
@@ -19477,7 +19477,7 @@
                 <a:ea typeface="Calibri" pitchFamily="34" charset="-122"/>
                 <a:cs typeface="Calibri" pitchFamily="34" charset="-120"/>
               </a:rPr>
-              <a:t>Siguiente paso: OJT supervisado y evaluación práctica (TD-P07); registro en IMaS y DC-3/SIRCE. Validación: visto bueno técnica (pendientes: seguridad, laboral, diseño instruccional).</a:t>
+              <a:t>Siguiente paso: OJT supervisado y evaluación práctica (TD-P07); registro en IMaS y DC-3/SIRCE. Validación: visto bueno técnica, seguridad, laboral, diseño instruccional.</a:t>
             </a:r>
             <a:endParaRPr lang="en-US" sz="750" dirty="0"/>
           </a:p>
@@ -24767,8 +24767,8 @@
         </p:blipFill>
         <p:spPr>
           <a:xfrm>
-            <a:off x="608729" y="1417320"/>
-            <a:ext cx="6646382" cy="4846320"/>
+            <a:off x="607463" y="1417320"/>
+            <a:ext cx="6648915" cy="4846320"/>
           </a:xfrm>
           <a:prstGeom prst="rect">
             <a:avLst/>
